--- a/DBTUNING/ch16_성능설계와개발/ch16_성능설계와개발.pptx
+++ b/DBTUNING/ch16_성능설계와개발/ch16_성능설계와개발.pptx
@@ -1096,7 +1096,7 @@
           <a:lstStyle/>
           <a:p>
             <a:r>
-              <a:t>실습 4에서는 SQL*Plus의 SET ARRAYSIZE로 값을 바꿔 가며 autotrace의 SQL*Net roundtrips와 consistent gets가 어떻게 달라지는지 관찰한다. arraysize를 15에서 1000으로 올리면 CLAIM_DETAILS처럼 대량 행을 반환하는 조회에서 왕복 횟수가 크게 줄고 논리 읽기도 함께 줄어든다. 주의할 것은 상위 대기가 SQL*Net message from client로 보인다고 곧 네트워크 문제로 단정하지 않는 것이다. arraysize가 작아 왕복을 너무 많이 한 것이 원인일 수 있으며, 이 경우 회선이 아니라 arraysize를 키우는 것이 해법이다. 이 오해 사례는 20장에서 다시 다룬다.</a:t>
+              <a:t>실습 4에서는 SQL*Plus의 SET ARRAYSIZE로 값을 바꿔 가며 autotrace의 SQL*Net roundtrips와 consistent gets가 어떻게 달라지는지 관찰한다. arraysize를 15에서 1000으로 올리면 CLAIM_DETAILS처럼 대량 행을 반환하는 조회에서 왕복 횟수가 크게 줄고 논리 읽기도 함께 줄어든다. 주의할 것은 상위 대기가 SQL*Net message from client로 보인다고 곧 네트워크 문제로 단정하지 않는 것이다. arraysize가 작아 왕복을 너무 많이 한 것이 원인일 수 있으며, 이 경우 회선이 아니라 arraysize를 키우는 것이 해법이다. 이 오해 사례는 ch34에서 다시 다룬다.</a:t>
             </a:r>
           </a:p>
         </p:txBody>
@@ -5361,7 +5361,7 @@
                 </a:solidFill>
                 <a:latin typeface="맑은 고딕"/>
               </a:rPr>
-              <a:t>제2장</a:t>
+              <a:t>제ch16</a:t>
             </a:r>
           </a:p>
         </p:txBody>
@@ -7663,7 +7663,7 @@
                 </a:solidFill>
                 <a:latin typeface="맑은 고딕"/>
               </a:rPr>
-              <a:t>•  전용 vs 공유 서버는 4장에서 별도로 다룸</a:t>
+              <a:t>•  전용 vs 공유 서버는 ch18에서 별도로 다룸</a:t>
             </a:r>
           </a:p>
         </p:txBody>
@@ -10185,7 +10185,7 @@
                 </a:solidFill>
                 <a:latin typeface="맑은 고딕"/>
               </a:rPr>
-              <a:t>•  비효율을 위한 여유를 미리 두고, 성능 방법(3장)으로 발견</a:t>
+              <a:t>•  비효율을 위한 여유를 미리 두고, 성능 방법(ch17)으로 발견</a:t>
             </a:r>
           </a:p>
         </p:txBody>

--- a/DBTUNING/ch16_성능설계와개발/ch16_성능설계와개발.pptx
+++ b/DBTUNING/ch16_성능설계와개발/ch16_성능설계와개발.pptx
@@ -5361,7 +5361,7 @@
                 </a:solidFill>
                 <a:latin typeface="맑은 고딕"/>
               </a:rPr>
-              <a:t>제ch16</a:t>
+              <a:t>ch16</a:t>
             </a:r>
           </a:p>
         </p:txBody>

--- a/DBTUNING/ch16_성능설계와개발/ch16_성능설계와개발.pptx
+++ b/DBTUNING/ch16_성능설계와개발/ch16_성능설계와개발.pptx
@@ -7095,7 +7095,7 @@
                 </a:solidFill>
                 <a:latin typeface="맑은 고딕"/>
               </a:rPr>
-              <a:t>2.4</a:t>
+              <a:t>16.4</a:t>
             </a:r>
           </a:p>
         </p:txBody>
@@ -8245,7 +8245,7 @@
                 </a:solidFill>
                 <a:latin typeface="맑은 고딕"/>
               </a:rPr>
-              <a:t>2.5</a:t>
+              <a:t>16.5</a:t>
             </a:r>
           </a:p>
         </p:txBody>
@@ -9167,7 +9167,7 @@
                 </a:solidFill>
                 <a:latin typeface="맑은 고딕"/>
               </a:rPr>
-              <a:t>2.6</a:t>
+              <a:t>16.6</a:t>
             </a:r>
           </a:p>
         </p:txBody>
@@ -9832,7 +9832,7 @@
                 </a:solidFill>
                 <a:latin typeface="맑은 고딕"/>
               </a:rPr>
-              <a:t>2.7</a:t>
+              <a:t>16.7</a:t>
             </a:r>
           </a:p>
         </p:txBody>
@@ -10317,7 +10317,7 @@
                 </a:solidFill>
                 <a:latin typeface="맑은 고딕"/>
               </a:rPr>
-              <a:t>•  2.2  확장성 — 무엇이 시스템을 못 늘어나게 하는가</a:t>
+              <a:t>•  16.2  확장성 — 무엇이 시스템을 못 늘어나게 하는가</a:t>
             </a:r>
           </a:p>
           <a:p>
@@ -10329,7 +10329,7 @@
                 </a:solidFill>
                 <a:latin typeface="맑은 고딕"/>
               </a:rPr>
-              <a:t>•  2.3  바인드 변수와 커서 공유 — 하드 파싱 비용 (이 장의 핵심)</a:t>
+              <a:t>•  16.3  바인드 변수와 커서 공유 — 하드 파싱 비용 (이 장의 핵심)</a:t>
             </a:r>
           </a:p>
           <a:p>
@@ -10341,7 +10341,7 @@
                 </a:solidFill>
                 <a:latin typeface="맑은 고딕"/>
               </a:rPr>
-              <a:t>•  2.4  커넥션 획득 비용 — 접속은 비싸다</a:t>
+              <a:t>•  16.4  커넥션 획득 비용 — 접속은 비싸다</a:t>
             </a:r>
           </a:p>
           <a:p>
@@ -10353,7 +10353,7 @@
                 </a:solidFill>
                 <a:latin typeface="맑은 고딕"/>
               </a:rPr>
-              <a:t>•  2.5  배열 처리와 왕복 횟수 — arraysize</a:t>
+              <a:t>•  16.5  배열 처리와 왕복 횟수 — arraysize</a:t>
             </a:r>
           </a:p>
           <a:p>
@@ -10365,7 +10365,7 @@
                 </a:solidFill>
                 <a:latin typeface="맑은 고딕"/>
               </a:rPr>
-              <a:t>•  2.6  그 밖의 애플리케이션 설계 원칙</a:t>
+              <a:t>•  16.6  그 밖의 애플리케이션 설계 원칙</a:t>
             </a:r>
           </a:p>
           <a:p>
@@ -10377,7 +10377,7 @@
                 </a:solidFill>
                 <a:latin typeface="맑은 고딕"/>
               </a:rPr>
-              <a:t>•  2.7  배포 전 워크로드 테스트</a:t>
+              <a:t>•  16.7  배포 전 워크로드 테스트</a:t>
             </a:r>
           </a:p>
           <a:p>
@@ -11695,7 +11695,7 @@
                 </a:solidFill>
                 <a:latin typeface="맑은 고딕"/>
               </a:rPr>
-              <a:t>2.2</a:t>
+              <a:t>16.2</a:t>
             </a:r>
           </a:p>
         </p:txBody>
@@ -12778,7 +12778,7 @@
                 </a:solidFill>
                 <a:latin typeface="맑은 고딕"/>
               </a:rPr>
-              <a:t>2.3</a:t>
+              <a:t>16.3</a:t>
             </a:r>
           </a:p>
         </p:txBody>
